--- a/paper/first_presentation/pitch.pptx
+++ b/paper/first_presentation/pitch.pptx
@@ -542,7 +542,7 @@
               <a:rPr lang="en-US" dirty="0"/>
               <a:t>FACTS FOR THE SPEAKER (not a script: say it in your own words)
 - 5 minutes in total, then 5 minutes of questions. Course rubric for the pitch: research question and motivation 4 points, project timeline 1 point.
-- The title is the working title of the project.
+- The title is the working title the team chose on 2026-10-04. The earlier one was "Beyond 'Arab' as a Single Category".
 - It is an audit of model behaviour, not a hiring tool. Everything is synthetic.
 - TO DO before presenting: replace [Name 2] and [Name 3] on this slide.
 - Time: about 15 seconds.</a:t>
@@ -636,6 +636,7 @@
               <a:t>FACTS FOR THE SPEAKER (not a script: say it in your own words)
 - By construction every version of a CV is equally qualified, so a systematic difference is not justified by the record. It is evidence about the model, never about people from a country.
 - A single CV line is a thin signal. Real discrimination also works through names, photos, accents, credentials and networks, which this design removes.
+- Nationality, not religion: the CVs state no religion. We measure how nationalities are treated, not bias against Islam. Arab is not the same as Muslim: most Muslims are not Arab. Turkish and Maldivian are Muslim-majority and not Arab (slide 8).
 - Results hold for the recorded model versions, prompts and dates.
 - A null result is reported with the same weight as a disparity.
 - Parked, not part of the course project: name-based check, German-language prompts, Arabic-centric models (ALLaM, Jais), LLM-judge coding of reasons, foreign-degree channel.</a:t>
@@ -727,8 +728,8 @@
             <a:r>
               <a:rPr lang="en-US" dirty="0"/>
               <a:t>FACTS FOR THE SPEAKER (not a script: say it in your own words)
-- All six sources were read in full text (verification level 'fulltext' in research/literature_matrix.csv). For Razzaz 2017 the executive summary and the nationality passages were read, not all 158 pages.
-- Hoffmann et al. 2026 is a preprint. Razzaz 2017 is a report, not a journal article.
+- All six sources were read in full text (verification level 'fulltext' in research/literature_matrix.csv). For Razzaz 2017 the executive summary and the nationality passages were read, not all 158 pages. For Abid et al. 2021 the arXiv version (2101.05783) was read on 2026-10-04.
+- Abid et al. 2021 tested GPT-3, a model of 2020. Razzaz 2017 is a report, not a journal article.
 - The team checks each number against the source before presenting.</a:t>
             </a:r>
             <a:endParaRPr lang="en-US" dirty="0"/>
@@ -820,9 +821,13 @@
               <a:t>FACTS FOR THE SPEAKER (not a script: say it in your own words)
 - Human employers: Lippens, Vermeiren &amp; Baert 2023, meta-analysis of correspondence experiments 2005-2020. Arab / Maghrebi / Middle Eastern names pooled: discrimination ratio 0.59 [0.55, 0.64], 31 effects, 69,311 observations, i.e. about a 41% lower chance of a positive callback.
 - Limits of that number: effect sizes differ a lot between studies (I2 = 87%). The field experiments on Arab names are from Western labour markets; we found no field experiment with applicant nationality inside an Arab country.
-- LLM, GPT-3.5: Lippens 2024. CV screening in Flanders, prompts in Dutch, 34,560 vacancy-CV combinations, 9 groups signalled by names. Arab names: -1.41 points on a 1-100 interview score (SE 0.21); ratio 0.85 at a cut-off of 75. One pooled Arab group; the nationality on the CV was fixed as Belgian.
-- LLM, Gemini 2.0 Flash: Hoffmann et al. 2026 (arXiv preprint). Freelancer-project fit on a European freelance marketplace, French prompts, 172,800 profile-brief pairs. Arabic-sounding male names: +0.001 on a 10-point scale, not significant.
-- Point of the slide: for LLMs the direction is open (a small penalty in one study, about zero in another), and every study uses one pooled group signalled by names.
+- LLM, generated text: Abid, Farooqi &amp; Zou 2021 (AIES). GPT-3 (davinci), prompt 'Two Muslims walked into a', 100 completions: 66 are violent, significantly fewer for other religious groups. 'Muslim' is analogised to 'terrorist' in 23% of test cases.
+- Limits of that number: it is about a religion, not a nationality; the paper does not mention Arabs or countries. GPT-3 is a model of 2020. A weaker form was still found in later GPT models (Hemmatian et al. 2023).
+- Why it is on this slide: the Arab League countries are majority-Muslim, and models bring up religion when they describe Middle Eastern people (Cheng, Durmus &amp; Jurafsky 2023). So a bias against Muslims can be expected to reach Arab nationalities. Do NOT say that Arab stands for Muslim: most Muslims are not Arab, and our CVs state no religion. We measure how nationalities are treated, not bias against Islam.
+- More of the same kind, if asked: names from the Middle East and North Africa appear 78% less often in generated workplace stories than their share of the US population would suggest, five models (Shieh et al. 2026).
+- LLM, hiring: Lippens 2024. GPT-3.5, CV screening in Flanders, prompts in Dutch, 34,560 vacancy-CV combinations, 9 groups signalled by names. Arab names: -1.41 points on a 1-100 interview score (SE 0.21); ratio 0.85 at a cut-off of 75. One pooled Arab group; the nationality on the CV was fixed as Belgian.
+- Taken off this slide and out of the proposal by the team on 2026-10-04, but be ready for them in questions: Hoffmann et al. 2026 (preprint), Gemini 2.0 Flash, pooled Arabic-sounding male names, about zero (+0.001 on a 10-point scale, not significant). Arcuschin et al. 2026: in hiring, loan and admission tasks every detected race or ethnicity bias favoured the minority group (21 to 0).
+- Point of the slide: the disadvantage is documented, and every study treats the group as one. Whether it appears in our four models is open; the German, Turkish and not-stated conditions will show it.
 - Do not say 'LLMs discriminate against Arab applicants' as a settled fact.
 - Time: about 60 seconds.</a:t>
             </a:r>
@@ -1009,7 +1014,9 @@
               <a:rPr lang="en-US" dirty="0"/>
               <a:t>FACTS FOR THE SPEAKER (not a script: say it in your own words)
 - The question on the slide is the working wording from the project brief. The team finalises it.
-- The main part is the second half: differences among the 22 Arab League nationalities. Arab vs German / Turkish is a secondary benchmark.
+- Short version, as the team put it on 2026-10-04: does a model see some Arab League nationalities more favourably than others?
+- Line of argument: a bias against Arabs and Muslims is documented, always for one pooled group (slide 2). We split the group into its 22 nationalities. Hiring and promotion are the measuring tool, not the claim.
+- The main part is the second half: differences among the 22 Arab League nationalities. Arab vs German / Turkish is a secondary benchmark. It shows whether the general disadvantage of slide 2 appears in our four models at all; that is open.
 - Placebo nationalities (Uruguayan, Malawian, Maldivian, Cambodian): any set of nationality labels makes a model's scores spread a little. The placebo set shows how large that spread is for countries unrelated to the Arab world.
 - The novelty is tentative. Searches on 29-30.09 and 04.10.2026 (arXiv, OpenAlex, general web, ACL Anthology, Crossref, part of Semantic Scholar) found no study in which an LLM makes a hiring decision and national origin varies across more than one Arab country. Say 'to our knowledge'. One paper is not yet read in full (Bilon 2025); no Arabic-language database was searched.
 - Not claimed as new: that LLMs penalise Arab applicants; that LLMs tell Arab countries apart in general; that origin matters in human hiring.
@@ -1103,7 +1110,8 @@
             <a:r>
               <a:rPr lang="en-US" dirty="0"/>
               <a:t>FACTS FOR THE SPEAKER (not a script: say it in your own words)
-- 20 jobs (7 low-skill, 6 mid, 2 mid-high, 5 high) and one CV per job at a middle qualification level. No names; no city, school or company from any country. Jobs require English only and every CV lists English (C1) only.
+- Why hiring and promotion: to compare 22 nationalities we need a task in which the nationality can change while everything else stays the same, and in which the model answers with a number. A CV does this. It is also how discrimination is usually measured among employers (correspondence experiments; Lippens, Vermeiren &amp; Baert 2023). The scenario is the measuring tool.
+- 20 jobs (7 low-skill, 6 mid, 2 mid-high, 5 high) and one CV per job at a middle qualification level. No names; no city, school or company from any country. Jobs require English only and every CV lists English (C1) only. The CV states a nationality and no religion.
 - Every job is set once in each of the 22 Arab League countries: 20 x 22 = 440 job-country combinations.
 - 29 nationality conditions: 22 Arab League nationalities, German and Turkish as benchmarks, 4 placebo nationalities (Uruguayan, Malawian, Maldivian, Cambodian), and one condition where the Nationality line is left out.
 - Experiment 1: rate one applicant (fit score 0-100 and interview yes/no). Experiment 2: choose between two applicants who have the same CV (A, B or lottery; and A or B). Experiment 3: both again with one added paragraph that tells the model to ignore nationality. Two scenarios: hiring and promotion. Three wordings of every message, used in rotation.
@@ -2549,7 +2557,7 @@
         </p:nvSpPr>
         <p:spPr>
           <a:xfrm>
-            <a:off x="640080" y="1188720"/>
+            <a:off x="640080" y="1531620"/>
             <a:ext cx="5943600" cy="274320"/>
           </a:xfrm>
           <a:prstGeom prst="rect">
@@ -2587,8 +2595,8 @@
         </p:nvSpPr>
         <p:spPr>
           <a:xfrm>
-            <a:off x="640080" y="1691640"/>
-            <a:ext cx="5303520" cy="1508760"/>
+            <a:off x="640080" y="2034540"/>
+            <a:ext cx="5303520" cy="914400"/>
           </a:xfrm>
           <a:prstGeom prst="rect">
             <a:avLst/>
@@ -2604,14 +2612,14 @@
               <a:buNone/>
             </a:pPr>
             <a:r>
-              <a:rPr lang="en-US" sz="4000" b="1" dirty="0">
+              <a:rPr lang="en-US" sz="5400" b="1" dirty="0">
                 <a:solidFill>
                   <a:schemeClr val="bg1"/>
                 </a:solidFill>
               </a:rPr>
-              <a:t>Beyond “Arab” as a Single Category</a:t>
-            </a:r>
-            <a:endParaRPr lang="en-US" sz="4000" dirty="0"/>
+              <a:t>Which Arab?</a:t>
+            </a:r>
+            <a:endParaRPr lang="en-US" sz="5400" dirty="0"/>
           </a:p>
         </p:txBody>
       </p:sp>
@@ -2625,7 +2633,7 @@
         </p:nvSpPr>
         <p:spPr>
           <a:xfrm>
-            <a:off x="640080" y="3383280"/>
+            <a:off x="640080" y="3101340"/>
             <a:ext cx="5669280" cy="868680"/>
           </a:xfrm>
           <a:prstGeom prst="rect">
@@ -2647,7 +2655,7 @@
                   <a:schemeClr val="accent5"/>
                 </a:solidFill>
               </a:rPr>
-              <a:t>A counterfactual audit of</a:t>
+              <a:t>How LLMs Treat Candidates from the 22 Arab League</a:t>
             </a:r>
             <a:br/>
             <a:pPr algn="l" indent="0" marL="0">
@@ -2659,7 +2667,7 @@
                   <a:schemeClr val="accent5"/>
                 </a:solidFill>
               </a:rPr>
-              <a:t>national-origin bias in LLM hiring</a:t>
+              <a:t>Countries in Hiring and Promotion</a:t>
             </a:r>
             <a:endParaRPr lang="en-US" sz="2000" dirty="0"/>
           </a:p>
@@ -4548,7 +4556,7 @@
                   <a:schemeClr val="accent4"/>
                 </a:solidFill>
               </a:rPr>
-              <a:t>Nationality is a single CV line. No names, English only, one CV per job.</a:t>
+              <a:t>Nationality is a single CV line. No names, no religion, English only, one CV per job.</a:t>
             </a:r>
             <a:endParaRPr lang="en-US" sz="1400" dirty="0"/>
           </a:p>
@@ -4923,7 +4931,7 @@
                   <a:schemeClr val="tx1"/>
                 </a:solidFill>
               </a:rPr>
-              <a:t>Albaroudi, E., Mansouri, T., Hatamleh, M., &amp; Alameer, A. (2026). Addressing intersectional bias in AI recruitment using HITHIRE model: a fair, ethical, green AI and transparent hiring solution for Saudi Arabia’s diverse workforce in line with vision 2030. AI and Ethics, 6(1), 57.</a:t>
+              <a:t>Abid, A., Farooqi, M., &amp; Zou, J. (2021). Persistent anti-Muslim bias in large language models. Proceedings of the 2021 AAAI/ACM Conference on AI, Ethics, and Society (AIES ’21), 298–306.</a:t>
             </a:r>
             <a:endParaRPr lang="en-US" sz="1400" dirty="0"/>
           </a:p>
@@ -4940,7 +4948,7 @@
                   <a:schemeClr val="tx1"/>
                 </a:solidFill>
               </a:rPr>
-              <a:t>Hoffmann, M., Jouffroy, E., Jouanneau, W., Palyart, M., &amp; Pebereau, C. (2026). Evaluating LLM behavior in hiring: Implicit weights, fairness across groups, and alignment with human preferences. arXiv:2601.11379.</a:t>
+              <a:t>Albaroudi, E., Mansouri, T., Hatamleh, M., &amp; Alameer, A. (2026). Addressing intersectional bias in AI recruitment using HITHIRE model: a fair, ethical, green AI and transparent hiring solution for Saudi Arabia’s diverse workforce in line with vision 2030. AI and Ethics, 6(1), 57.</a:t>
             </a:r>
             <a:endParaRPr lang="en-US" sz="1400" dirty="0"/>
           </a:p>
@@ -5116,7 +5124,7 @@
                   <a:schemeClr val="tx2"/>
                 </a:solidFill>
               </a:rPr>
-              <a:t>Prior evidence treats “Arab” as one group</a:t>
+              <a:t>The bias is documented, the group is pooled</a:t>
             </a:r>
             <a:endParaRPr lang="en-US" sz="3600" dirty="0"/>
           </a:p>
@@ -5379,7 +5387,7 @@
                   <a:schemeClr val="accent1"/>
                 </a:solidFill>
               </a:rPr>
-              <a:t>LLM  ·  GPT-3.5</a:t>
+              <a:t>LLM  ·  GPT-3  ·  TEXT</a:t>
             </a:r>
             <a:endParaRPr lang="en-US" sz="1100" dirty="0"/>
           </a:p>
@@ -5418,7 +5426,7 @@
                 <a:ea typeface="+mj-lt" pitchFamily="34" charset="-122"/>
                 <a:cs typeface="+mj-lt" pitchFamily="34" charset="-120"/>
               </a:rPr>
-              <a:t>−1.41</a:t>
+              <a:t>66%</a:t>
             </a:r>
             <a:endParaRPr lang="en-US" sz="6000" dirty="0"/>
           </a:p>
@@ -5454,7 +5462,7 @@
                   <a:schemeClr val="tx1"/>
                 </a:solidFill>
               </a:rPr>
-              <a:t>points on a 1–100 score</a:t>
+              <a:t>violent completions</a:t>
             </a:r>
             <a:endParaRPr lang="en-US" sz="1600" dirty="0"/>
           </a:p>
@@ -5490,7 +5498,7 @@
                   <a:schemeClr val="accent4"/>
                 </a:solidFill>
               </a:rPr>
-              <a:t>Arab names as one group, on otherwise identical CVs. 34,560 vacancy–CV pairs.</a:t>
+              <a:t>Prompt: “Two Muslims walked into a”. Significantly fewer for other religious groups.</a:t>
             </a:r>
             <a:endParaRPr lang="en-US" sz="1400" dirty="0"/>
           </a:p>
@@ -5526,7 +5534,7 @@
                   <a:schemeClr val="accent4"/>
                 </a:solidFill>
               </a:rPr>
-              <a:t>Lippens (2024)</a:t>
+              <a:t>Abid, Farooqi &amp; Zou (2021)</a:t>
             </a:r>
             <a:endParaRPr lang="en-US" sz="1100" dirty="0"/>
           </a:p>
@@ -5584,7 +5592,7 @@
                   <a:schemeClr val="accent1"/>
                 </a:solidFill>
               </a:rPr>
-              <a:t>LLM  ·  GEMINI 2.0 FLASH</a:t>
+              <a:t>LLM  ·  GPT-3.5  ·  HIRING</a:t>
             </a:r>
             <a:endParaRPr lang="en-US" sz="1100" dirty="0"/>
           </a:p>
@@ -5617,13 +5625,13 @@
             <a:r>
               <a:rPr lang="en-US" sz="6000" b="1" dirty="0">
                 <a:solidFill>
-                  <a:schemeClr val="tx2"/>
+                  <a:schemeClr val="accent2"/>
                 </a:solidFill>
                 <a:latin typeface="+mj-lt" pitchFamily="34" charset="0"/>
                 <a:ea typeface="+mj-lt" pitchFamily="34" charset="-122"/>
                 <a:cs typeface="+mj-lt" pitchFamily="34" charset="-120"/>
               </a:rPr>
-              <a:t>≈ 0</a:t>
+              <a:t>−1.41</a:t>
             </a:r>
             <a:endParaRPr lang="en-US" sz="6000" dirty="0"/>
           </a:p>
@@ -5659,7 +5667,7 @@
                   <a:schemeClr val="tx1"/>
                 </a:solidFill>
               </a:rPr>
-              <a:t>average effect</a:t>
+              <a:t>points on a 1–100 score</a:t>
             </a:r>
             <a:endParaRPr lang="en-US" sz="1600" dirty="0"/>
           </a:p>
@@ -5695,7 +5703,7 @@
                   <a:schemeClr val="accent4"/>
                 </a:solidFill>
               </a:rPr>
-              <a:t>Arabic-sounding male names as one group. Freelancer–project fit, 172,800 pairs.</a:t>
+              <a:t>Arab names as one group, on otherwise identical CVs. 34,560 vacancy–CV pairs.</a:t>
             </a:r>
             <a:endParaRPr lang="en-US" sz="1400" dirty="0"/>
           </a:p>
@@ -5731,7 +5739,7 @@
                   <a:schemeClr val="accent4"/>
                 </a:solidFill>
               </a:rPr>
-              <a:t>Hoffmann et al. (2026), preprint</a:t>
+              <a:t>Lippens (2024)</a:t>
             </a:r>
             <a:endParaRPr lang="en-US" sz="1100" dirty="0"/>
           </a:p>
@@ -5789,7 +5797,7 @@
                   <a:schemeClr val="bg1"/>
                 </a:solidFill>
               </a:rPr>
-              <a:t>For LLMs the result is open. In every study: one pooled group, signalled by a name.</a:t>
+              <a:t>In all three: one pooled group. The countries behind the label stay invisible.</a:t>
             </a:r>
             <a:endParaRPr lang="en-US" sz="1800" dirty="0"/>
           </a:p>
